--- a/portfolio/risk-copilot-pitch-5.pptx
+++ b/portfolio/risk-copilot-pitch-5.pptx
@@ -2141,7 +2141,7 @@
       </p:sp>
       <p:pic>
         <p:nvPicPr>
-          <p:cNvPr id="4" name="Image 0" descr="deck_img/C_workbench_full.jpg">    </p:cNvPr>
+          <p:cNvPr id="4" name="Image 0" descr="deck_img/C_analyst_evidence_5of5.jpg">    </p:cNvPr>
           <p:cNvPicPr>
             <a:picLocks noChangeAspect="1"/>
           </p:cNvPicPr>
@@ -2274,7 +2274,7 @@
                 <a:ea typeface="Calibri" pitchFamily="34" charset="-122"/>
                 <a:cs typeface="Calibri" pitchFamily="34" charset="-120"/>
               </a:rPr>
-              <a:t>Built on qualys-cli-mcp, Qualys's own MCP server: read-only, module-allowlisted, every call written to an append-only audit log.</a:t>
+              <a:t>A running app on the qualys-cli-mcp contract: read-only enforced server-side, module-allowlisted, every call written to an append-only audit log.</a:t>
             </a:r>
             <a:endParaRPr lang="en-US" sz="1200" dirty="0"/>
           </a:p>
@@ -2322,7 +2322,7 @@
                 <a:ea typeface="Calibri" pitchFamily="34" charset="-122"/>
                 <a:cs typeface="Calibri" pitchFamily="34" charset="-120"/>
               </a:rPr>
-              <a:t>Every answer is stamped with the tool that produced it. An analyst can defend the output without trusting the model.</a:t>
+              <a:t>Send a write command through the passthrough and it returns 403 — then logs that you tried. The guardrail runs; it is not drawn.</a:t>
             </a:r>
             <a:endParaRPr lang="en-US" sz="1200" dirty="0"/>
           </a:p>
@@ -3002,7 +3002,7 @@
                 <a:ea typeface="Calibri" pitchFamily="34" charset="-122"/>
                 <a:cs typeface="Calibri" pitchFamily="34" charset="-120"/>
               </a:rPr>
-              <a:t>No live tenant data was used anywhere in this prototype. Every figure above is either counted from the server's own spec or labelled as a model. That distinction is the whole reason a CISO would believe the next slide.</a:t>
+              <a:t>No live tenant sits behind this yet — the data is local. But the governance layer is executable, not illustrated: the allowlist restricts, the write is rejected, the audit log records both. Every figure above is either counted from the server's own spec or labelled as a model.</a:t>
             </a:r>
             <a:endParaRPr lang="en-US" sz="1100" dirty="0"/>
           </a:p>
@@ -3966,7 +3966,7 @@
                 <a:ea typeface="Calibri" pitchFamily="34" charset="-122"/>
                 <a:cs typeface="Calibri" pitchFamily="34" charset="-120"/>
               </a:rPr>
-              <a:t>One backend engineer, part-time, to wire a live MCP session behind the prototype surface.</a:t>
+              <a:t>One backend engineer, part-time, to swap the local data layer for live qualys-cli calls.</a:t>
             </a:r>
             <a:endParaRPr lang="en-US" sz="1200" dirty="0"/>
           </a:p>
@@ -4224,7 +4224,7 @@
                 <a:ea typeface="Calibri" pitchFamily="34" charset="-122"/>
                 <a:cs typeface="Calibri" pitchFamily="34" charset="-120"/>
               </a:rPr>
-              <a:t>The prototype, the workflow and this deck were built without any of the above. That is the point — the expensive part was the judgment, not the budget.</a:t>
+              <a:t>The running application, the persona walkthrough and this deck were built without any of the above. That is the point — the expensive part was the judgment, not the budget.</a:t>
             </a:r>
             <a:endParaRPr lang="en-US" sz="1100" dirty="0"/>
           </a:p>
